--- a/RTR14호기_펀칭문제.pptx
+++ b/RTR14호기_펀칭문제.pptx
@@ -15,7 +15,7 @@
     <p:sldId id="263" r:id="rId9"/>
   </p:sldIdLst>
   <p:sldSz cx="12192000" cy="6858000"/>
-  <p:notesSz cx="6858000" cy="9144000"/>
+  <p:notesSz cx="6797675" cy="9874250"/>
   <p:defaultTextStyle>
     <a:defPPr>
       <a:defRPr lang="ko-KR"/>
@@ -111,6 +111,11 @@
       </a:defRPr>
     </a:lvl9pPr>
   </p:defaultTextStyle>
+  <p:extLst>
+    <p:ext uri="{EFAFB233-063F-42B5-8137-9DF3F51BA10A}">
+      <p15:sldGuideLst xmlns:p15="http://schemas.microsoft.com/office/powerpoint/2012/main"/>
+    </p:ext>
+  </p:extLst>
 </p:presentation>
 </file>
 
@@ -245,7 +250,7 @@
           <a:p>
             <a:fld id="{1B903BE0-B045-4492-8FE1-D764F7D095C3}" type="datetimeFigureOut">
               <a:rPr lang="ko-KR" altLang="en-US" smtClean="0"/>
-              <a:t>2025-05-23</a:t>
+              <a:t>2026-01-23</a:t>
             </a:fld>
             <a:endParaRPr lang="ko-KR" altLang="en-US"/>
           </a:p>
@@ -415,7 +420,7 @@
           <a:p>
             <a:fld id="{1B903BE0-B045-4492-8FE1-D764F7D095C3}" type="datetimeFigureOut">
               <a:rPr lang="ko-KR" altLang="en-US" smtClean="0"/>
-              <a:t>2025-05-23</a:t>
+              <a:t>2026-01-23</a:t>
             </a:fld>
             <a:endParaRPr lang="ko-KR" altLang="en-US"/>
           </a:p>
@@ -595,7 +600,7 @@
           <a:p>
             <a:fld id="{1B903BE0-B045-4492-8FE1-D764F7D095C3}" type="datetimeFigureOut">
               <a:rPr lang="ko-KR" altLang="en-US" smtClean="0"/>
-              <a:t>2025-05-23</a:t>
+              <a:t>2026-01-23</a:t>
             </a:fld>
             <a:endParaRPr lang="ko-KR" altLang="en-US"/>
           </a:p>
@@ -765,7 +770,7 @@
           <a:p>
             <a:fld id="{1B903BE0-B045-4492-8FE1-D764F7D095C3}" type="datetimeFigureOut">
               <a:rPr lang="ko-KR" altLang="en-US" smtClean="0"/>
-              <a:t>2025-05-23</a:t>
+              <a:t>2026-01-23</a:t>
             </a:fld>
             <a:endParaRPr lang="ko-KR" altLang="en-US"/>
           </a:p>
@@ -1011,7 +1016,7 @@
           <a:p>
             <a:fld id="{1B903BE0-B045-4492-8FE1-D764F7D095C3}" type="datetimeFigureOut">
               <a:rPr lang="ko-KR" altLang="en-US" smtClean="0"/>
-              <a:t>2025-05-23</a:t>
+              <a:t>2026-01-23</a:t>
             </a:fld>
             <a:endParaRPr lang="ko-KR" altLang="en-US"/>
           </a:p>
@@ -1243,7 +1248,7 @@
           <a:p>
             <a:fld id="{1B903BE0-B045-4492-8FE1-D764F7D095C3}" type="datetimeFigureOut">
               <a:rPr lang="ko-KR" altLang="en-US" smtClean="0"/>
-              <a:t>2025-05-23</a:t>
+              <a:t>2026-01-23</a:t>
             </a:fld>
             <a:endParaRPr lang="ko-KR" altLang="en-US"/>
           </a:p>
@@ -1610,7 +1615,7 @@
           <a:p>
             <a:fld id="{1B903BE0-B045-4492-8FE1-D764F7D095C3}" type="datetimeFigureOut">
               <a:rPr lang="ko-KR" altLang="en-US" smtClean="0"/>
-              <a:t>2025-05-23</a:t>
+              <a:t>2026-01-23</a:t>
             </a:fld>
             <a:endParaRPr lang="ko-KR" altLang="en-US"/>
           </a:p>
@@ -1728,7 +1733,7 @@
           <a:p>
             <a:fld id="{1B903BE0-B045-4492-8FE1-D764F7D095C3}" type="datetimeFigureOut">
               <a:rPr lang="ko-KR" altLang="en-US" smtClean="0"/>
-              <a:t>2025-05-23</a:t>
+              <a:t>2026-01-23</a:t>
             </a:fld>
             <a:endParaRPr lang="ko-KR" altLang="en-US"/>
           </a:p>
@@ -1823,7 +1828,7 @@
           <a:p>
             <a:fld id="{1B903BE0-B045-4492-8FE1-D764F7D095C3}" type="datetimeFigureOut">
               <a:rPr lang="ko-KR" altLang="en-US" smtClean="0"/>
-              <a:t>2025-05-23</a:t>
+              <a:t>2026-01-23</a:t>
             </a:fld>
             <a:endParaRPr lang="ko-KR" altLang="en-US"/>
           </a:p>
@@ -2100,7 +2105,7 @@
           <a:p>
             <a:fld id="{1B903BE0-B045-4492-8FE1-D764F7D095C3}" type="datetimeFigureOut">
               <a:rPr lang="ko-KR" altLang="en-US" smtClean="0"/>
-              <a:t>2025-05-23</a:t>
+              <a:t>2026-01-23</a:t>
             </a:fld>
             <a:endParaRPr lang="ko-KR" altLang="en-US"/>
           </a:p>
@@ -2353,7 +2358,7 @@
           <a:p>
             <a:fld id="{1B903BE0-B045-4492-8FE1-D764F7D095C3}" type="datetimeFigureOut">
               <a:rPr lang="ko-KR" altLang="en-US" smtClean="0"/>
-              <a:t>2025-05-23</a:t>
+              <a:t>2026-01-23</a:t>
             </a:fld>
             <a:endParaRPr lang="ko-KR" altLang="en-US"/>
           </a:p>
@@ -2566,7 +2571,7 @@
           <a:p>
             <a:fld id="{1B903BE0-B045-4492-8FE1-D764F7D095C3}" type="datetimeFigureOut">
               <a:rPr lang="ko-KR" altLang="en-US" smtClean="0"/>
-              <a:t>2025-05-23</a:t>
+              <a:t>2026-01-23</a:t>
             </a:fld>
             <a:endParaRPr lang="ko-KR" altLang="en-US"/>
           </a:p>
